--- a/Modul Minna 1/Bab 6/31. Minna 1 Tata Bahasa Bab 6 - Slide.pptx
+++ b/Modul Minna 1/Bab 6/31. Minna 1 Tata Bahasa Bab 6 - Slide.pptx
@@ -6715,7 +6715,7 @@
                 <a:ea typeface="Arial" pitchFamily="34" charset="-122"/>
                 <a:cs typeface="Arial" pitchFamily="34" charset="-120"/>
               </a:rPr>
-              <a:t>いっしょにきょうとへいきませんか。</a:t>
+              <a:t>いっしょにバンドンへいきませんか。</a:t>
             </a:r>
             <a:endParaRPr lang="en-US" sz="1700" dirty="0"/>
           </a:p>
@@ -6754,7 +6754,7 @@
                 <a:ea typeface="Arial" pitchFamily="34" charset="-122"/>
                 <a:cs typeface="Arial" pitchFamily="34" charset="-120"/>
               </a:rPr>
-              <a:t>issho ni Kyouto e ikimasen ka</a:t>
+              <a:t>issho ni Bandon e ikimasen ka</a:t>
             </a:r>
             <a:pPr indent="0" marL="0">
               <a:buNone/>
@@ -6782,7 +6782,7 @@
                 <a:ea typeface="Arial" pitchFamily="34" charset="-122"/>
                 <a:cs typeface="Arial" pitchFamily="34" charset="-120"/>
               </a:rPr>
-              <a:t>Mau pergi ke Kyoto bareng?</a:t>
+              <a:t>Mau pergi ke Bandung bareng?</a:t>
             </a:r>
             <a:endParaRPr lang="en-US" sz="950" dirty="0"/>
           </a:p>
@@ -7791,7 +7791,7 @@
                 <a:ea typeface="Arial" pitchFamily="34" charset="-122"/>
                 <a:cs typeface="Arial" pitchFamily="34" charset="-120"/>
               </a:rPr>
-              <a:t>きょうとですか。いいですね。</a:t>
+              <a:t>バンドンですか。いいですね。</a:t>
             </a:r>
             <a:endParaRPr lang="en-US" sz="1700" dirty="0"/>
           </a:p>
@@ -7830,7 +7830,7 @@
                 <a:ea typeface="Arial" pitchFamily="34" charset="-122"/>
                 <a:cs typeface="Arial" pitchFamily="34" charset="-120"/>
               </a:rPr>
-              <a:t>Kyouto desu ka. ii desu ne</a:t>
+              <a:t>Bandon desu ka. ii desu ne</a:t>
             </a:r>
             <a:pPr indent="0" marL="0">
               <a:buNone/>
@@ -7858,7 +7858,7 @@
                 <a:ea typeface="Arial" pitchFamily="34" charset="-122"/>
                 <a:cs typeface="Arial" pitchFamily="34" charset="-120"/>
               </a:rPr>
-              <a:t>Oh, ke Kyoto ya? Asyik.</a:t>
+              <a:t>Oh, ke Bandung ya? Asyik.</a:t>
             </a:r>
             <a:endParaRPr lang="en-US" sz="950" dirty="0"/>
           </a:p>
